--- a/dist/초4/사회·역사/경제와참여/초4_사회·역사_경제와참여_01_필요와선택_학생용.pptx
+++ b/dist/초4/사회·역사/경제와참여/초4_사회·역사_경제와참여_01_필요와선택_학생용.pptx
@@ -120,13 +120,13 @@
   <p:extLst>
     <p:ext uri="{521415D9-36F7-43E2-AB2F-B90AF26B5E84}">
       <p14:sectionLst xmlns:p14="http://schemas.microsoft.com/office/powerpoint/2010/main">
-        <p14:section name="도입" id="{031ab9bb-d8ca-1aa7-26c9-1dbdb2fa8eaa}">
+        <p14:section name="도입" id="{136d58df-0ba0-a9bf-106c-467af9cde8fd}">
           <p14:sldIdLst>
             <p14:sldId id="256"/>
             <p14:sldId id="257"/>
           </p14:sldIdLst>
         </p14:section>
-        <p14:section name="개념" id="{6a9d8839-8c73-f10b-a477-93de21abf1f5}">
+        <p14:section name="개념" id="{e7e8489f-e557-2fbb-e309-2ae94eaaf478}">
           <p14:sldIdLst>
             <p14:sldId id="258"/>
             <p14:sldId id="259"/>
@@ -134,7 +134,7 @@
             <p14:sldId id="263"/>
           </p14:sldIdLst>
         </p14:section>
-        <p14:section name="연습" id="{960f6bf9-ccdd-5918-613c-602c2ff3e84d}">
+        <p14:section name="연습" id="{89f5d900-1b43-1b18-18ce-ba552c61540f}">
           <p14:sldIdLst>
             <p14:sldId id="260"/>
             <p14:sldId id="261"/>
@@ -142,24 +142,24 @@
             <p14:sldId id="265"/>
           </p14:sldIdLst>
         </p14:section>
-        <p14:section name="개념" id="{402d4354-4d3a-dcaa-6d1c-be41e34ca7f7}">
+        <p14:section name="개념" id="{6655d6a8-6227-0bb6-43d5-29b773fc3be4}">
           <p14:sldIdLst/>
         </p14:section>
-        <p14:section name="연습" id="{1b672a25-3808-415a-5098-e6c84e62db10}">
+        <p14:section name="연습" id="{a0a19e69-9bc2-0430-a06a-c242274362eb}">
           <p14:sldIdLst/>
         </p14:section>
-        <p14:section name="확인" id="{065c39b3-b5ce-b9fc-4684-0082f8454c3a}">
+        <p14:section name="확인" id="{27c9e7a8-98de-1e33-ea53-484bf1105a21}">
           <p14:sldIdLst>
             <p14:sldId id="266"/>
             <p14:sldId id="267"/>
           </p14:sldIdLst>
         </p14:section>
-        <p14:section name="정리" id="{d9cff184-1e9f-a0ff-3c4d-a69fa11b0dc2}">
+        <p14:section name="정리" id="{cdbb41f5-eacf-2656-ca55-b02ddbecdb18}">
           <p14:sldIdLst>
             <p14:sldId id="268"/>
           </p14:sldIdLst>
         </p14:section>
-        <p14:section name="보충" id="{762ad80e-ab25-c400-a413-5b62e7bd2a54}">
+        <p14:section name="보충" id="{056dcd6e-55ed-fdf8-13d7-edd44af8cb74}">
           <p14:sldIdLst>
             <p14:sldId id="269"/>
           </p14:sldIdLst>
@@ -7005,7 +7005,27 @@
                 <a:ea typeface="맑은 고딕" pitchFamily="34" charset="-122"/>
                 <a:cs typeface="맑은 고딕" pitchFamily="34" charset="-120"/>
               </a:rPr>
-              <a:t>모두 가질 수 없으니 무엇을 할지 골라야 해요. 이것이 선택이에요.</a:t>
+              <a:t>모두 가질 수 없으니 무엇을 할지 골라야 해요.</a:t>
+            </a:r>
+            <a:endParaRPr lang="ko-KR" sz="3000" dirty="0"/>
+          </a:p>
+          <a:p>
+            <a:pPr eaLnBrk="0" indent="0" marL="0">
+              <a:spcAft>
+                <a:spcPts val="600"/>
+              </a:spcAft>
+              <a:buNone/>
+            </a:pPr>
+            <a:r>
+              <a:rPr lang="ko-KR" altLang="en-US" sz="3000" dirty="0">
+                <a:solidFill>
+                  <a:srgbClr val="1F2937"/>
+                </a:solidFill>
+                <a:latin typeface="맑은 고딕" pitchFamily="34" charset="0"/>
+                <a:ea typeface="맑은 고딕" pitchFamily="34" charset="-122"/>
+                <a:cs typeface="맑은 고딕" pitchFamily="34" charset="-120"/>
+              </a:rPr>
+              <a:t>이것을 선택이라고 해요.</a:t>
             </a:r>
             <a:endParaRPr lang="ko-KR" sz="3000" dirty="0"/>
           </a:p>
@@ -7332,7 +7352,7 @@
                 <a:ea typeface="맑은 고딕" pitchFamily="34" charset="-122"/>
                 <a:cs typeface="맑은 고딕" pitchFamily="34" charset="-120"/>
               </a:rPr>
-              <a:t>형제가 모두 먹고 싶어요.</a:t>
+              <a:t>형제가 다 원해요.</a:t>
             </a:r>
             <a:endParaRPr lang="ko-KR" sz="3000" dirty="0"/>
           </a:p>
@@ -7926,7 +7946,27 @@
                 <a:ea typeface="맑은 고딕" pitchFamily="34" charset="-122"/>
                 <a:cs typeface="맑은 고딕" pitchFamily="34" charset="-120"/>
               </a:rPr>
-              <a:t>우리 집에는 우산이 2개 있어요. 가족 네 명이 모두 밖에 나가야 해요.</a:t>
+              <a:t>우리 집에는 우산이 2개 있어요.</a:t>
+            </a:r>
+            <a:endParaRPr lang="ko-KR" sz="3000" dirty="0"/>
+          </a:p>
+          <a:p>
+            <a:pPr eaLnBrk="0" indent="0" marL="0">
+              <a:spcAft>
+                <a:spcPts val="600"/>
+              </a:spcAft>
+              <a:buNone/>
+            </a:pPr>
+            <a:r>
+              <a:rPr lang="ko-KR" altLang="en-US" sz="3000" dirty="0">
+                <a:solidFill>
+                  <a:srgbClr val="1F2937"/>
+                </a:solidFill>
+                <a:latin typeface="맑은 고딕" pitchFamily="34" charset="0"/>
+                <a:ea typeface="맑은 고딕" pitchFamily="34" charset="-122"/>
+                <a:cs typeface="맑은 고딕" pitchFamily="34" charset="-120"/>
+              </a:rPr>
+              <a:t>가족 네 명이 모두 밖에 나가야 해요.</a:t>
             </a:r>
             <a:endParaRPr lang="ko-KR" sz="3000" dirty="0"/>
           </a:p>
@@ -8996,7 +9036,27 @@
                 <a:ea typeface="맑은 고딕" pitchFamily="34" charset="-122"/>
                 <a:cs typeface="맑은 고딕" pitchFamily="34" charset="-120"/>
               </a:rPr>
-              <a:t>색연필 세트와 공책을 사면 5,000원. 스티커와 과자는 이번에 포기해요.</a:t>
+              <a:t>색연필 세트와 공책을 사면 5,000원.</a:t>
+            </a:r>
+            <a:endParaRPr lang="ko-KR" sz="3000" dirty="0"/>
+          </a:p>
+          <a:p>
+            <a:pPr eaLnBrk="0" indent="0" marL="0">
+              <a:spcAft>
+                <a:spcPts val="600"/>
+              </a:spcAft>
+              <a:buNone/>
+            </a:pPr>
+            <a:r>
+              <a:rPr lang="ko-KR" altLang="en-US" sz="3000" dirty="0">
+                <a:solidFill>
+                  <a:srgbClr val="1F2937"/>
+                </a:solidFill>
+                <a:latin typeface="맑은 고딕" pitchFamily="34" charset="0"/>
+                <a:ea typeface="맑은 고딕" pitchFamily="34" charset="-122"/>
+                <a:cs typeface="맑은 고딕" pitchFamily="34" charset="-120"/>
+              </a:rPr>
+              <a:t>스티커와 과자는 이번에 포기해요.</a:t>
             </a:r>
             <a:endParaRPr lang="ko-KR" sz="3000" dirty="0"/>
           </a:p>

--- a/dist/초4/사회·역사/경제와참여/초4_사회·역사_경제와참여_01_필요와선택_학생용.pptx
+++ b/dist/초4/사회·역사/경제와참여/초4_사회·역사_경제와참여_01_필요와선택_학생용.pptx
@@ -120,13 +120,13 @@
   <p:extLst>
     <p:ext uri="{521415D9-36F7-43E2-AB2F-B90AF26B5E84}">
       <p14:sectionLst xmlns:p14="http://schemas.microsoft.com/office/powerpoint/2010/main">
-        <p14:section name="도입" id="{136d58df-0ba0-a9bf-106c-467af9cde8fd}">
+        <p14:section name="도입" id="{f75db5dc-cea5-7c7c-107b-604da70b4027}">
           <p14:sldIdLst>
             <p14:sldId id="256"/>
             <p14:sldId id="257"/>
           </p14:sldIdLst>
         </p14:section>
-        <p14:section name="개념" id="{e7e8489f-e557-2fbb-e309-2ae94eaaf478}">
+        <p14:section name="개념" id="{db97f4f4-2884-e190-7dbc-70f11ba88d46}">
           <p14:sldIdLst>
             <p14:sldId id="258"/>
             <p14:sldId id="259"/>
@@ -134,7 +134,7 @@
             <p14:sldId id="263"/>
           </p14:sldIdLst>
         </p14:section>
-        <p14:section name="연습" id="{89f5d900-1b43-1b18-18ce-ba552c61540f}">
+        <p14:section name="연습" id="{a9f42834-692d-58ad-8eab-06a92e32bf82}">
           <p14:sldIdLst>
             <p14:sldId id="260"/>
             <p14:sldId id="261"/>
@@ -142,24 +142,24 @@
             <p14:sldId id="265"/>
           </p14:sldIdLst>
         </p14:section>
-        <p14:section name="개념" id="{6655d6a8-6227-0bb6-43d5-29b773fc3be4}">
+        <p14:section name="개념" id="{69aa3905-5f86-1f1e-4919-b0c23acf2c4e}">
           <p14:sldIdLst/>
         </p14:section>
-        <p14:section name="연습" id="{a0a19e69-9bc2-0430-a06a-c242274362eb}">
+        <p14:section name="연습" id="{8110f80c-b4e9-31ef-d9a6-27e1f4ae5b16}">
           <p14:sldIdLst/>
         </p14:section>
-        <p14:section name="확인" id="{27c9e7a8-98de-1e33-ea53-484bf1105a21}">
+        <p14:section name="확인" id="{b61460c4-0bc2-82d6-ff32-506cb4ef9488}">
           <p14:sldIdLst>
             <p14:sldId id="266"/>
             <p14:sldId id="267"/>
           </p14:sldIdLst>
         </p14:section>
-        <p14:section name="정리" id="{cdbb41f5-eacf-2656-ca55-b02ddbecdb18}">
+        <p14:section name="정리" id="{3154852f-2887-5a49-f101-bf65fafd0427}">
           <p14:sldIdLst>
             <p14:sldId id="268"/>
           </p14:sldIdLst>
         </p14:section>
-        <p14:section name="보충" id="{056dcd6e-55ed-fdf8-13d7-edd44af8cb74}">
+        <p14:section name="보충" id="{7902ad5c-5ad6-f498-a60f-0bf93aa32b2c}">
           <p14:sldIdLst>
             <p14:sldId id="269"/>
           </p14:sldIdLst>
@@ -3164,7 +3164,7 @@
                 <a:ea typeface="맑은 고딕" pitchFamily="34" charset="-122"/>
                 <a:cs typeface="맑은 고딕" pitchFamily="34" charset="-120"/>
               </a:rPr>
-              <a:t>☐ 부족했던 것(돈·시간·물건)</a:t>
+              <a:t>☐ 부족했던 것</a:t>
             </a:r>
             <a:endParaRPr lang="ko-KR" sz="3000" dirty="0"/>
           </a:p>
@@ -5172,11 +5172,11 @@
         <p:spPr>
           <a:xfrm>
             <a:off x="548640" y="1325880"/>
-            <a:ext cx="11091672" cy="1723644"/>
+            <a:ext cx="11091672" cy="1258824"/>
           </a:xfrm>
           <a:prstGeom prst="roundRect">
             <a:avLst>
-              <a:gd name="adj" fmla="val 6366"/>
+              <a:gd name="adj" fmla="val 8717"/>
             </a:avLst>
           </a:prstGeom>
           <a:solidFill>
@@ -5199,7 +5199,7 @@
         <p:spPr>
           <a:xfrm>
             <a:off x="822960" y="1463040"/>
-            <a:ext cx="10543032" cy="1449324"/>
+            <a:ext cx="10543032" cy="984504"/>
           </a:xfrm>
           <a:prstGeom prst="rect">
             <a:avLst/>
@@ -5226,7 +5226,7 @@
                 <a:ea typeface="맑은 고딕" pitchFamily="34" charset="-122"/>
                 <a:cs typeface="맑은 고딕" pitchFamily="34" charset="-120"/>
               </a:rPr>
-              <a:t>원하는 것에 비해 돈·시간·물건이 부족해서(희소성) 우리는 골라야 해요.</a:t>
+              <a:t>돈·시간·물건이 부족해서(희소성) 우리는 골라야 해요.</a:t>
             </a:r>
             <a:endParaRPr lang="ko-KR" sz="3000" dirty="0"/>
           </a:p>
@@ -5260,7 +5260,7 @@
         </p:nvSpPr>
         <p:spPr>
           <a:xfrm>
-            <a:off x="548640" y="3278124"/>
+            <a:off x="548640" y="2813304"/>
             <a:ext cx="5431536" cy="594360"/>
           </a:xfrm>
           <a:prstGeom prst="roundRect">
@@ -5307,7 +5307,7 @@
         </p:nvSpPr>
         <p:spPr>
           <a:xfrm>
-            <a:off x="6208776" y="3278124"/>
+            <a:off x="6208776" y="2813304"/>
             <a:ext cx="5431536" cy="594360"/>
           </a:xfrm>
           <a:prstGeom prst="roundRect">
@@ -5354,7 +5354,7 @@
         </p:nvSpPr>
         <p:spPr>
           <a:xfrm>
-            <a:off x="548640" y="4101084"/>
+            <a:off x="548640" y="3636264"/>
             <a:ext cx="11091672" cy="457200"/>
           </a:xfrm>
           <a:prstGeom prst="rect">
@@ -5393,8 +5393,8 @@
         </p:nvSpPr>
         <p:spPr>
           <a:xfrm>
-            <a:off x="548640" y="4604004"/>
-            <a:ext cx="3544824" cy="973836"/>
+            <a:off x="548640" y="4139184"/>
+            <a:ext cx="3544824" cy="1438656"/>
           </a:xfrm>
           <a:prstGeom prst="rect">
             <a:avLst/>
@@ -5432,8 +5432,8 @@
         </p:nvSpPr>
         <p:spPr>
           <a:xfrm>
-            <a:off x="4322064" y="4604004"/>
-            <a:ext cx="3544824" cy="973836"/>
+            <a:off x="4322064" y="4139184"/>
+            <a:ext cx="3544824" cy="1438656"/>
           </a:xfrm>
           <a:prstGeom prst="rect">
             <a:avLst/>
@@ -5488,8 +5488,8 @@
         </p:nvSpPr>
         <p:spPr>
           <a:xfrm>
-            <a:off x="8095488" y="4604004"/>
-            <a:ext cx="3544824" cy="973836"/>
+            <a:off x="8095488" y="4139184"/>
+            <a:ext cx="3544824" cy="1438656"/>
           </a:xfrm>
           <a:prstGeom prst="rect">
             <a:avLst/>

--- a/dist/초4/사회·역사/경제와참여/초4_사회·역사_경제와참여_01_필요와선택_학생용.pptx
+++ b/dist/초4/사회·역사/경제와참여/초4_사회·역사_경제와참여_01_필요와선택_학생용.pptx
@@ -120,13 +120,13 @@
   <p:extLst>
     <p:ext uri="{521415D9-36F7-43E2-AB2F-B90AF26B5E84}">
       <p14:sectionLst xmlns:p14="http://schemas.microsoft.com/office/powerpoint/2010/main">
-        <p14:section name="도입" id="{f75db5dc-cea5-7c7c-107b-604da70b4027}">
+        <p14:section name="도입" id="{e422df4c-36c7-2b5c-e913-e8c4e0b374f2}">
           <p14:sldIdLst>
             <p14:sldId id="256"/>
             <p14:sldId id="257"/>
           </p14:sldIdLst>
         </p14:section>
-        <p14:section name="개념" id="{db97f4f4-2884-e190-7dbc-70f11ba88d46}">
+        <p14:section name="개념" id="{a8375701-0dba-cf03-bef3-77dfa9ff995f}">
           <p14:sldIdLst>
             <p14:sldId id="258"/>
             <p14:sldId id="259"/>
@@ -134,7 +134,7 @@
             <p14:sldId id="263"/>
           </p14:sldIdLst>
         </p14:section>
-        <p14:section name="연습" id="{a9f42834-692d-58ad-8eab-06a92e32bf82}">
+        <p14:section name="연습" id="{58ad302f-9a35-eb92-fd93-ec0e4a35fa2f}">
           <p14:sldIdLst>
             <p14:sldId id="260"/>
             <p14:sldId id="261"/>
@@ -142,24 +142,24 @@
             <p14:sldId id="265"/>
           </p14:sldIdLst>
         </p14:section>
-        <p14:section name="개념" id="{69aa3905-5f86-1f1e-4919-b0c23acf2c4e}">
+        <p14:section name="개념" id="{166a16d1-2371-efdb-2a9c-c9f214aee6a0}">
           <p14:sldIdLst/>
         </p14:section>
-        <p14:section name="연습" id="{8110f80c-b4e9-31ef-d9a6-27e1f4ae5b16}">
+        <p14:section name="연습" id="{58201d66-7679-d084-5996-adf4f72d06e6}">
           <p14:sldIdLst/>
         </p14:section>
-        <p14:section name="확인" id="{b61460c4-0bc2-82d6-ff32-506cb4ef9488}">
+        <p14:section name="확인" id="{93adcb22-6e6d-101c-3394-94a1c19340cc}">
           <p14:sldIdLst>
             <p14:sldId id="266"/>
             <p14:sldId id="267"/>
           </p14:sldIdLst>
         </p14:section>
-        <p14:section name="정리" id="{3154852f-2887-5a49-f101-bf65fafd0427}">
+        <p14:section name="정리" id="{d5dc07b0-f585-c388-870c-310acc0e0f67}">
           <p14:sldIdLst>
             <p14:sldId id="268"/>
           </p14:sldIdLst>
         </p14:section>
-        <p14:section name="보충" id="{7902ad5c-5ad6-f498-a60f-0bf93aa32b2c}">
+        <p14:section name="보충" id="{cb7d6541-1820-b69f-c9bd-b694e06feead}">
           <p14:sldIdLst>
             <p14:sldId id="269"/>
           </p14:sldIdLst>
